--- a/Project PPT for IBM Bob GSLH.pptx
+++ b/Project PPT for IBM Bob GSLH.pptx
@@ -278,7 +278,7 @@
       </p15:sldGuideLst>
     </p:ext>
     <p:ext uri="GoogleSlidesCustomDataVersion2">
-      <go:slidesCustomData xmlns="" xmlns:mc="http://schemas.openxmlformats.org/markup-compatibility/2006" xmlns:mv="urn:schemas-microsoft-com:mac:vml" xmlns:c="http://schemas.openxmlformats.org/drawingml/2006/chart" xmlns:dgm="http://schemas.openxmlformats.org/drawingml/2006/diagram" xmlns:o="urn:schemas-microsoft-com:office:office" xmlns:v="urn:schemas-microsoft-com:vml" xmlns:pvml="urn:schemas-microsoft-com:office:powerpoint" xmlns:com="http://schemas.openxmlformats.org/drawingml/2006/compatibility" xmlns:p14="http://schemas.microsoft.com/office/powerpoint/2010/main" xmlns:p15="http://schemas.microsoft.com/office/powerpoint/2012/main" xmlns:ahyp="http://schemas.microsoft.com/office/drawing/2018/hyperlinkcolor" xmlns:go="http://customooxmlschemas.google.com/" r:id="rId28" roundtripDataSignature="AMtx7mjt3491jQ7aCoyIz2WXeHKroE7tpQ=="/>
+      <go:slidesCustomData xmlns:go="http://customooxmlschemas.google.com/" xmlns:ahyp="http://schemas.microsoft.com/office/drawing/2018/hyperlinkcolor" xmlns:p15="http://schemas.microsoft.com/office/powerpoint/2012/main" xmlns:p14="http://schemas.microsoft.com/office/powerpoint/2010/main" xmlns:com="http://schemas.openxmlformats.org/drawingml/2006/compatibility" xmlns:pvml="urn:schemas-microsoft-com:office:powerpoint" xmlns:v="urn:schemas-microsoft-com:vml" xmlns:o="urn:schemas-microsoft-com:office:office" xmlns:dgm="http://schemas.openxmlformats.org/drawingml/2006/diagram" xmlns:c="http://schemas.openxmlformats.org/drawingml/2006/chart" xmlns:mv="urn:schemas-microsoft-com:mac:vml" xmlns:mc="http://schemas.openxmlformats.org/markup-compatibility/2006" xmlns="" r:id="rId28" roundtripDataSignature="AMtx7mjt3491jQ7aCoyIz2WXeHKroE7tpQ=="/>
     </p:ext>
   </p:extLst>
 </p:presentation>
@@ -847,7 +847,7 @@
         <p:cNvPr id="1" name="Shape 170">
           <a:extLst>
             <a:ext uri="{FF2B5EF4-FFF2-40B4-BE49-F238E27FC236}">
-              <a16:creationId xmlns="" xmlns:a16="http://schemas.microsoft.com/office/drawing/2014/main" id="{E1412E85-19BE-A4D2-3A42-8118C838244E}"/>
+              <a16:creationId xmlns:a16="http://schemas.microsoft.com/office/drawing/2014/main" xmlns="" id="{E1412E85-19BE-A4D2-3A42-8118C838244E}"/>
             </a:ext>
           </a:extLst>
         </p:cNvPr>
@@ -867,7 +867,7 @@
           <p:cNvPr id="171" name="Google Shape;171;p7:notes">
             <a:extLst>
               <a:ext uri="{FF2B5EF4-FFF2-40B4-BE49-F238E27FC236}">
-                <a16:creationId xmlns="" xmlns:a16="http://schemas.microsoft.com/office/drawing/2014/main" id="{C19DA990-6141-A1FE-8846-7567C539931A}"/>
+                <a16:creationId xmlns:a16="http://schemas.microsoft.com/office/drawing/2014/main" xmlns="" id="{C19DA990-6141-A1FE-8846-7567C539931A}"/>
               </a:ext>
             </a:extLst>
           </p:cNvPr>
@@ -911,7 +911,7 @@
           <p:cNvPr id="172" name="Google Shape;172;p7:notes">
             <a:extLst>
               <a:ext uri="{FF2B5EF4-FFF2-40B4-BE49-F238E27FC236}">
-                <a16:creationId xmlns="" xmlns:a16="http://schemas.microsoft.com/office/drawing/2014/main" id="{78ED0245-E9EA-4854-4BC6-4C85ED385053}"/>
+                <a16:creationId xmlns:a16="http://schemas.microsoft.com/office/drawing/2014/main" xmlns="" id="{78ED0245-E9EA-4854-4BC6-4C85ED385053}"/>
               </a:ext>
             </a:extLst>
           </p:cNvPr>
@@ -974,7 +974,7 @@
         <p:cNvPr id="1" name="Shape 170">
           <a:extLst>
             <a:ext uri="{FF2B5EF4-FFF2-40B4-BE49-F238E27FC236}">
-              <a16:creationId xmlns="" xmlns:a16="http://schemas.microsoft.com/office/drawing/2014/main" id="{1010730D-B05E-5843-B75E-442772C5CBD3}"/>
+              <a16:creationId xmlns:a16="http://schemas.microsoft.com/office/drawing/2014/main" xmlns="" id="{1010730D-B05E-5843-B75E-442772C5CBD3}"/>
             </a:ext>
           </a:extLst>
         </p:cNvPr>
@@ -994,7 +994,7 @@
           <p:cNvPr id="171" name="Google Shape;171;p7:notes">
             <a:extLst>
               <a:ext uri="{FF2B5EF4-FFF2-40B4-BE49-F238E27FC236}">
-                <a16:creationId xmlns="" xmlns:a16="http://schemas.microsoft.com/office/drawing/2014/main" id="{3B1B9E69-D5B7-1EDE-695B-8A72F215EE0C}"/>
+                <a16:creationId xmlns:a16="http://schemas.microsoft.com/office/drawing/2014/main" xmlns="" id="{3B1B9E69-D5B7-1EDE-695B-8A72F215EE0C}"/>
               </a:ext>
             </a:extLst>
           </p:cNvPr>
@@ -1038,7 +1038,7 @@
           <p:cNvPr id="172" name="Google Shape;172;p7:notes">
             <a:extLst>
               <a:ext uri="{FF2B5EF4-FFF2-40B4-BE49-F238E27FC236}">
-                <a16:creationId xmlns="" xmlns:a16="http://schemas.microsoft.com/office/drawing/2014/main" id="{C97573FA-7DA9-832E-211C-9E472EC40213}"/>
+                <a16:creationId xmlns:a16="http://schemas.microsoft.com/office/drawing/2014/main" xmlns="" id="{C97573FA-7DA9-832E-211C-9E472EC40213}"/>
               </a:ext>
             </a:extLst>
           </p:cNvPr>
@@ -1210,7 +1210,7 @@
         <p:cNvPr id="1" name="Shape 271">
           <a:extLst>
             <a:ext uri="{FF2B5EF4-FFF2-40B4-BE49-F238E27FC236}">
-              <a16:creationId xmlns="" xmlns:a16="http://schemas.microsoft.com/office/drawing/2014/main" id="{8E9CB32A-B328-07DF-4F33-E0118C920B5A}"/>
+              <a16:creationId xmlns:a16="http://schemas.microsoft.com/office/drawing/2014/main" xmlns="" id="{8E9CB32A-B328-07DF-4F33-E0118C920B5A}"/>
             </a:ext>
           </a:extLst>
         </p:cNvPr>
@@ -1230,7 +1230,7 @@
           <p:cNvPr id="272" name="Google Shape;272;p18:notes">
             <a:extLst>
               <a:ext uri="{FF2B5EF4-FFF2-40B4-BE49-F238E27FC236}">
-                <a16:creationId xmlns="" xmlns:a16="http://schemas.microsoft.com/office/drawing/2014/main" id="{8BD392DC-EA03-14B5-7A53-AC36124B41C4}"/>
+                <a16:creationId xmlns:a16="http://schemas.microsoft.com/office/drawing/2014/main" xmlns="" id="{8BD392DC-EA03-14B5-7A53-AC36124B41C4}"/>
               </a:ext>
             </a:extLst>
           </p:cNvPr>
@@ -1274,7 +1274,7 @@
           <p:cNvPr id="273" name="Google Shape;273;p18:notes">
             <a:extLst>
               <a:ext uri="{FF2B5EF4-FFF2-40B4-BE49-F238E27FC236}">
-                <a16:creationId xmlns="" xmlns:a16="http://schemas.microsoft.com/office/drawing/2014/main" id="{F90BE8D5-07EC-73D0-0A62-4778024FF054}"/>
+                <a16:creationId xmlns:a16="http://schemas.microsoft.com/office/drawing/2014/main" xmlns="" id="{F90BE8D5-07EC-73D0-0A62-4778024FF054}"/>
               </a:ext>
             </a:extLst>
           </p:cNvPr>
@@ -1337,7 +1337,7 @@
         <p:cNvPr id="1" name="Shape 271">
           <a:extLst>
             <a:ext uri="{FF2B5EF4-FFF2-40B4-BE49-F238E27FC236}">
-              <a16:creationId xmlns="" xmlns:a16="http://schemas.microsoft.com/office/drawing/2014/main" id="{4F18774C-544B-0071-4FA9-86D0ADEC5A87}"/>
+              <a16:creationId xmlns:a16="http://schemas.microsoft.com/office/drawing/2014/main" xmlns="" id="{4F18774C-544B-0071-4FA9-86D0ADEC5A87}"/>
             </a:ext>
           </a:extLst>
         </p:cNvPr>
@@ -1357,7 +1357,7 @@
           <p:cNvPr id="272" name="Google Shape;272;p18:notes">
             <a:extLst>
               <a:ext uri="{FF2B5EF4-FFF2-40B4-BE49-F238E27FC236}">
-                <a16:creationId xmlns="" xmlns:a16="http://schemas.microsoft.com/office/drawing/2014/main" id="{68645894-EE59-A5F4-D411-C82EB564E1C4}"/>
+                <a16:creationId xmlns:a16="http://schemas.microsoft.com/office/drawing/2014/main" xmlns="" id="{68645894-EE59-A5F4-D411-C82EB564E1C4}"/>
               </a:ext>
             </a:extLst>
           </p:cNvPr>
@@ -1401,7 +1401,7 @@
           <p:cNvPr id="273" name="Google Shape;273;p18:notes">
             <a:extLst>
               <a:ext uri="{FF2B5EF4-FFF2-40B4-BE49-F238E27FC236}">
-                <a16:creationId xmlns="" xmlns:a16="http://schemas.microsoft.com/office/drawing/2014/main" id="{FEE489F0-0910-6D8B-0254-C25DB0882728}"/>
+                <a16:creationId xmlns:a16="http://schemas.microsoft.com/office/drawing/2014/main" xmlns="" id="{FEE489F0-0910-6D8B-0254-C25DB0882728}"/>
               </a:ext>
             </a:extLst>
           </p:cNvPr>
@@ -1464,7 +1464,7 @@
         <p:cNvPr id="1" name="Shape 271">
           <a:extLst>
             <a:ext uri="{FF2B5EF4-FFF2-40B4-BE49-F238E27FC236}">
-              <a16:creationId xmlns="" xmlns:a16="http://schemas.microsoft.com/office/drawing/2014/main" id="{BB47F127-39C9-4CE0-52A6-66BD53AE96F2}"/>
+              <a16:creationId xmlns:a16="http://schemas.microsoft.com/office/drawing/2014/main" xmlns="" id="{BB47F127-39C9-4CE0-52A6-66BD53AE96F2}"/>
             </a:ext>
           </a:extLst>
         </p:cNvPr>
@@ -1484,7 +1484,7 @@
           <p:cNvPr id="272" name="Google Shape;272;p18:notes">
             <a:extLst>
               <a:ext uri="{FF2B5EF4-FFF2-40B4-BE49-F238E27FC236}">
-                <a16:creationId xmlns="" xmlns:a16="http://schemas.microsoft.com/office/drawing/2014/main" id="{57CB72F8-8B0E-1466-D091-917F3E755920}"/>
+                <a16:creationId xmlns:a16="http://schemas.microsoft.com/office/drawing/2014/main" xmlns="" id="{57CB72F8-8B0E-1466-D091-917F3E755920}"/>
               </a:ext>
             </a:extLst>
           </p:cNvPr>
@@ -1528,7 +1528,7 @@
           <p:cNvPr id="273" name="Google Shape;273;p18:notes">
             <a:extLst>
               <a:ext uri="{FF2B5EF4-FFF2-40B4-BE49-F238E27FC236}">
-                <a16:creationId xmlns="" xmlns:a16="http://schemas.microsoft.com/office/drawing/2014/main" id="{1CEA3A31-DD75-5F0D-19FB-8192F5E7F99F}"/>
+                <a16:creationId xmlns:a16="http://schemas.microsoft.com/office/drawing/2014/main" xmlns="" id="{1CEA3A31-DD75-5F0D-19FB-8192F5E7F99F}"/>
               </a:ext>
             </a:extLst>
           </p:cNvPr>
@@ -1591,7 +1591,7 @@
         <p:cNvPr id="1" name="Shape 197">
           <a:extLst>
             <a:ext uri="{FF2B5EF4-FFF2-40B4-BE49-F238E27FC236}">
-              <a16:creationId xmlns="" xmlns:a16="http://schemas.microsoft.com/office/drawing/2014/main" id="{C2F88CF5-D0C3-0228-6C1A-E849738B9B34}"/>
+              <a16:creationId xmlns:a16="http://schemas.microsoft.com/office/drawing/2014/main" xmlns="" id="{C2F88CF5-D0C3-0228-6C1A-E849738B9B34}"/>
             </a:ext>
           </a:extLst>
         </p:cNvPr>
@@ -1611,7 +1611,7 @@
           <p:cNvPr id="198" name="Google Shape;198;p10:notes">
             <a:extLst>
               <a:ext uri="{FF2B5EF4-FFF2-40B4-BE49-F238E27FC236}">
-                <a16:creationId xmlns="" xmlns:a16="http://schemas.microsoft.com/office/drawing/2014/main" id="{15C41DBA-EB5E-9EB1-28D2-68EF3081A29D}"/>
+                <a16:creationId xmlns:a16="http://schemas.microsoft.com/office/drawing/2014/main" xmlns="" id="{15C41DBA-EB5E-9EB1-28D2-68EF3081A29D}"/>
               </a:ext>
             </a:extLst>
           </p:cNvPr>
@@ -1655,7 +1655,7 @@
           <p:cNvPr id="199" name="Google Shape;199;p10:notes">
             <a:extLst>
               <a:ext uri="{FF2B5EF4-FFF2-40B4-BE49-F238E27FC236}">
-                <a16:creationId xmlns="" xmlns:a16="http://schemas.microsoft.com/office/drawing/2014/main" id="{9AACA92E-BC74-25E5-B8D5-2E658F81C2F0}"/>
+                <a16:creationId xmlns:a16="http://schemas.microsoft.com/office/drawing/2014/main" xmlns="" id="{9AACA92E-BC74-25E5-B8D5-2E658F81C2F0}"/>
               </a:ext>
             </a:extLst>
           </p:cNvPr>
@@ -1718,7 +1718,7 @@
         <p:cNvPr id="1" name="Shape 271">
           <a:extLst>
             <a:ext uri="{FF2B5EF4-FFF2-40B4-BE49-F238E27FC236}">
-              <a16:creationId xmlns="" xmlns:a16="http://schemas.microsoft.com/office/drawing/2014/main" id="{F99EC48D-986D-5759-BB30-643EB8E645D6}"/>
+              <a16:creationId xmlns:a16="http://schemas.microsoft.com/office/drawing/2014/main" xmlns="" id="{F99EC48D-986D-5759-BB30-643EB8E645D6}"/>
             </a:ext>
           </a:extLst>
         </p:cNvPr>
@@ -1738,7 +1738,7 @@
           <p:cNvPr id="272" name="Google Shape;272;p18:notes">
             <a:extLst>
               <a:ext uri="{FF2B5EF4-FFF2-40B4-BE49-F238E27FC236}">
-                <a16:creationId xmlns="" xmlns:a16="http://schemas.microsoft.com/office/drawing/2014/main" id="{18B9E3A1-6FB8-9155-61D2-ACE1911D3DDC}"/>
+                <a16:creationId xmlns:a16="http://schemas.microsoft.com/office/drawing/2014/main" xmlns="" id="{18B9E3A1-6FB8-9155-61D2-ACE1911D3DDC}"/>
               </a:ext>
             </a:extLst>
           </p:cNvPr>
@@ -1782,7 +1782,7 @@
           <p:cNvPr id="273" name="Google Shape;273;p18:notes">
             <a:extLst>
               <a:ext uri="{FF2B5EF4-FFF2-40B4-BE49-F238E27FC236}">
-                <a16:creationId xmlns="" xmlns:a16="http://schemas.microsoft.com/office/drawing/2014/main" id="{A030ED18-5AAE-8953-2668-AE98C5E83A7B}"/>
+                <a16:creationId xmlns:a16="http://schemas.microsoft.com/office/drawing/2014/main" xmlns="" id="{A030ED18-5AAE-8953-2668-AE98C5E83A7B}"/>
               </a:ext>
             </a:extLst>
           </p:cNvPr>
@@ -1845,7 +1845,7 @@
         <p:cNvPr id="1" name="Shape 271">
           <a:extLst>
             <a:ext uri="{FF2B5EF4-FFF2-40B4-BE49-F238E27FC236}">
-              <a16:creationId xmlns="" xmlns:a16="http://schemas.microsoft.com/office/drawing/2014/main" id="{A795C14E-5D6A-39A3-2018-2C72BB451BBD}"/>
+              <a16:creationId xmlns:a16="http://schemas.microsoft.com/office/drawing/2014/main" xmlns="" id="{A795C14E-5D6A-39A3-2018-2C72BB451BBD}"/>
             </a:ext>
           </a:extLst>
         </p:cNvPr>
@@ -1865,7 +1865,7 @@
           <p:cNvPr id="272" name="Google Shape;272;p18:notes">
             <a:extLst>
               <a:ext uri="{FF2B5EF4-FFF2-40B4-BE49-F238E27FC236}">
-                <a16:creationId xmlns="" xmlns:a16="http://schemas.microsoft.com/office/drawing/2014/main" id="{85B8BB2F-0927-3841-AC64-CC67B5035869}"/>
+                <a16:creationId xmlns:a16="http://schemas.microsoft.com/office/drawing/2014/main" xmlns="" id="{85B8BB2F-0927-3841-AC64-CC67B5035869}"/>
               </a:ext>
             </a:extLst>
           </p:cNvPr>
@@ -1909,7 +1909,7 @@
           <p:cNvPr id="273" name="Google Shape;273;p18:notes">
             <a:extLst>
               <a:ext uri="{FF2B5EF4-FFF2-40B4-BE49-F238E27FC236}">
-                <a16:creationId xmlns="" xmlns:a16="http://schemas.microsoft.com/office/drawing/2014/main" id="{58797E72-A3BC-0A49-07C4-DE7FDA752365}"/>
+                <a16:creationId xmlns:a16="http://schemas.microsoft.com/office/drawing/2014/main" xmlns="" id="{58797E72-A3BC-0A49-07C4-DE7FDA752365}"/>
               </a:ext>
             </a:extLst>
           </p:cNvPr>
@@ -2081,7 +2081,7 @@
         <p:cNvPr id="1" name="Shape 100">
           <a:extLst>
             <a:ext uri="{FF2B5EF4-FFF2-40B4-BE49-F238E27FC236}">
-              <a16:creationId xmlns="" xmlns:a16="http://schemas.microsoft.com/office/drawing/2014/main" id="{48C2B95B-FB15-C156-6AF1-35B35818164E}"/>
+              <a16:creationId xmlns:a16="http://schemas.microsoft.com/office/drawing/2014/main" xmlns="" id="{48C2B95B-FB15-C156-6AF1-35B35818164E}"/>
             </a:ext>
           </a:extLst>
         </p:cNvPr>
@@ -2101,7 +2101,7 @@
           <p:cNvPr id="101" name="Google Shape;101;p3:notes">
             <a:extLst>
               <a:ext uri="{FF2B5EF4-FFF2-40B4-BE49-F238E27FC236}">
-                <a16:creationId xmlns="" xmlns:a16="http://schemas.microsoft.com/office/drawing/2014/main" id="{770A13E9-BC77-63DA-E106-A3FA8022811A}"/>
+                <a16:creationId xmlns:a16="http://schemas.microsoft.com/office/drawing/2014/main" xmlns="" id="{770A13E9-BC77-63DA-E106-A3FA8022811A}"/>
               </a:ext>
             </a:extLst>
           </p:cNvPr>
@@ -2145,7 +2145,7 @@
           <p:cNvPr id="102" name="Google Shape;102;p3:notes">
             <a:extLst>
               <a:ext uri="{FF2B5EF4-FFF2-40B4-BE49-F238E27FC236}">
-                <a16:creationId xmlns="" xmlns:a16="http://schemas.microsoft.com/office/drawing/2014/main" id="{29067B0F-2F4F-7081-A661-0AE31BFBB786}"/>
+                <a16:creationId xmlns:a16="http://schemas.microsoft.com/office/drawing/2014/main" xmlns="" id="{29067B0F-2F4F-7081-A661-0AE31BFBB786}"/>
               </a:ext>
             </a:extLst>
           </p:cNvPr>
@@ -2208,7 +2208,7 @@
         <p:cNvPr id="1" name="Shape 100">
           <a:extLst>
             <a:ext uri="{FF2B5EF4-FFF2-40B4-BE49-F238E27FC236}">
-              <a16:creationId xmlns="" xmlns:a16="http://schemas.microsoft.com/office/drawing/2014/main" id="{E37D20EF-0791-5303-F96E-0F0C1B50B73D}"/>
+              <a16:creationId xmlns:a16="http://schemas.microsoft.com/office/drawing/2014/main" xmlns="" id="{E37D20EF-0791-5303-F96E-0F0C1B50B73D}"/>
             </a:ext>
           </a:extLst>
         </p:cNvPr>
@@ -2228,7 +2228,7 @@
           <p:cNvPr id="101" name="Google Shape;101;p3:notes">
             <a:extLst>
               <a:ext uri="{FF2B5EF4-FFF2-40B4-BE49-F238E27FC236}">
-                <a16:creationId xmlns="" xmlns:a16="http://schemas.microsoft.com/office/drawing/2014/main" id="{9DCBA8EB-6D71-7B5E-841C-4BFFBDA5F1BE}"/>
+                <a16:creationId xmlns:a16="http://schemas.microsoft.com/office/drawing/2014/main" xmlns="" id="{9DCBA8EB-6D71-7B5E-841C-4BFFBDA5F1BE}"/>
               </a:ext>
             </a:extLst>
           </p:cNvPr>
@@ -2272,7 +2272,7 @@
           <p:cNvPr id="102" name="Google Shape;102;p3:notes">
             <a:extLst>
               <a:ext uri="{FF2B5EF4-FFF2-40B4-BE49-F238E27FC236}">
-                <a16:creationId xmlns="" xmlns:a16="http://schemas.microsoft.com/office/drawing/2014/main" id="{5C2CD162-5BE5-06C8-E06C-B4A49D4BCFF2}"/>
+                <a16:creationId xmlns:a16="http://schemas.microsoft.com/office/drawing/2014/main" xmlns="" id="{5C2CD162-5BE5-06C8-E06C-B4A49D4BCFF2}"/>
               </a:ext>
             </a:extLst>
           </p:cNvPr>
@@ -2335,7 +2335,7 @@
         <p:cNvPr id="1" name="Shape 197">
           <a:extLst>
             <a:ext uri="{FF2B5EF4-FFF2-40B4-BE49-F238E27FC236}">
-              <a16:creationId xmlns="" xmlns:a16="http://schemas.microsoft.com/office/drawing/2014/main" id="{11626E4B-E119-2382-6F8F-518641144E90}"/>
+              <a16:creationId xmlns:a16="http://schemas.microsoft.com/office/drawing/2014/main" xmlns="" id="{11626E4B-E119-2382-6F8F-518641144E90}"/>
             </a:ext>
           </a:extLst>
         </p:cNvPr>
@@ -2355,7 +2355,7 @@
           <p:cNvPr id="198" name="Google Shape;198;p10:notes">
             <a:extLst>
               <a:ext uri="{FF2B5EF4-FFF2-40B4-BE49-F238E27FC236}">
-                <a16:creationId xmlns="" xmlns:a16="http://schemas.microsoft.com/office/drawing/2014/main" id="{01A6FF9F-971F-6CD8-61F5-25638A5985F7}"/>
+                <a16:creationId xmlns:a16="http://schemas.microsoft.com/office/drawing/2014/main" xmlns="" id="{01A6FF9F-971F-6CD8-61F5-25638A5985F7}"/>
               </a:ext>
             </a:extLst>
           </p:cNvPr>
@@ -2399,7 +2399,7 @@
           <p:cNvPr id="199" name="Google Shape;199;p10:notes">
             <a:extLst>
               <a:ext uri="{FF2B5EF4-FFF2-40B4-BE49-F238E27FC236}">
-                <a16:creationId xmlns="" xmlns:a16="http://schemas.microsoft.com/office/drawing/2014/main" id="{C8EB5C80-6A4B-AE05-9BE0-03B5AF5C22AD}"/>
+                <a16:creationId xmlns:a16="http://schemas.microsoft.com/office/drawing/2014/main" xmlns="" id="{C8EB5C80-6A4B-AE05-9BE0-03B5AF5C22AD}"/>
               </a:ext>
             </a:extLst>
           </p:cNvPr>
@@ -2462,7 +2462,7 @@
         <p:cNvPr id="1" name="Shape 128">
           <a:extLst>
             <a:ext uri="{FF2B5EF4-FFF2-40B4-BE49-F238E27FC236}">
-              <a16:creationId xmlns="" xmlns:a16="http://schemas.microsoft.com/office/drawing/2014/main" id="{59B870D7-ED5B-C7CD-FB99-2991954CAA65}"/>
+              <a16:creationId xmlns:a16="http://schemas.microsoft.com/office/drawing/2014/main" xmlns="" id="{59B870D7-ED5B-C7CD-FB99-2991954CAA65}"/>
             </a:ext>
           </a:extLst>
         </p:cNvPr>
@@ -2482,7 +2482,7 @@
           <p:cNvPr id="129" name="Google Shape;129;p5:notes">
             <a:extLst>
               <a:ext uri="{FF2B5EF4-FFF2-40B4-BE49-F238E27FC236}">
-                <a16:creationId xmlns="" xmlns:a16="http://schemas.microsoft.com/office/drawing/2014/main" id="{C8B270BB-F67C-52E3-249C-6FE0C237CA97}"/>
+                <a16:creationId xmlns:a16="http://schemas.microsoft.com/office/drawing/2014/main" xmlns="" id="{C8B270BB-F67C-52E3-249C-6FE0C237CA97}"/>
               </a:ext>
             </a:extLst>
           </p:cNvPr>
@@ -2526,7 +2526,7 @@
           <p:cNvPr id="130" name="Google Shape;130;p5:notes">
             <a:extLst>
               <a:ext uri="{FF2B5EF4-FFF2-40B4-BE49-F238E27FC236}">
-                <a16:creationId xmlns="" xmlns:a16="http://schemas.microsoft.com/office/drawing/2014/main" id="{151B863E-6240-36E9-EB23-2DAA667D2518}"/>
+                <a16:creationId xmlns:a16="http://schemas.microsoft.com/office/drawing/2014/main" xmlns="" id="{151B863E-6240-36E9-EB23-2DAA667D2518}"/>
               </a:ext>
             </a:extLst>
           </p:cNvPr>
@@ -2589,7 +2589,7 @@
         <p:cNvPr id="1" name="Shape 170">
           <a:extLst>
             <a:ext uri="{FF2B5EF4-FFF2-40B4-BE49-F238E27FC236}">
-              <a16:creationId xmlns="" xmlns:a16="http://schemas.microsoft.com/office/drawing/2014/main" id="{279463AA-D7FA-5F7E-C4D0-06BDEDCBB932}"/>
+              <a16:creationId xmlns:a16="http://schemas.microsoft.com/office/drawing/2014/main" xmlns="" id="{279463AA-D7FA-5F7E-C4D0-06BDEDCBB932}"/>
             </a:ext>
           </a:extLst>
         </p:cNvPr>
@@ -2609,7 +2609,7 @@
           <p:cNvPr id="171" name="Google Shape;171;p7:notes">
             <a:extLst>
               <a:ext uri="{FF2B5EF4-FFF2-40B4-BE49-F238E27FC236}">
-                <a16:creationId xmlns="" xmlns:a16="http://schemas.microsoft.com/office/drawing/2014/main" id="{A84E3171-2C5C-8738-5718-5608CE1B13A4}"/>
+                <a16:creationId xmlns:a16="http://schemas.microsoft.com/office/drawing/2014/main" xmlns="" id="{A84E3171-2C5C-8738-5718-5608CE1B13A4}"/>
               </a:ext>
             </a:extLst>
           </p:cNvPr>
@@ -2653,7 +2653,7 @@
           <p:cNvPr id="172" name="Google Shape;172;p7:notes">
             <a:extLst>
               <a:ext uri="{FF2B5EF4-FFF2-40B4-BE49-F238E27FC236}">
-                <a16:creationId xmlns="" xmlns:a16="http://schemas.microsoft.com/office/drawing/2014/main" id="{E16E406D-2512-5EF2-0167-6C8953469546}"/>
+                <a16:creationId xmlns:a16="http://schemas.microsoft.com/office/drawing/2014/main" xmlns="" id="{E16E406D-2512-5EF2-0167-6C8953469546}"/>
               </a:ext>
             </a:extLst>
           </p:cNvPr>
@@ -2716,7 +2716,7 @@
         <p:cNvPr id="1" name="Shape 170">
           <a:extLst>
             <a:ext uri="{FF2B5EF4-FFF2-40B4-BE49-F238E27FC236}">
-              <a16:creationId xmlns="" xmlns:a16="http://schemas.microsoft.com/office/drawing/2014/main" id="{9E1C0F14-DBDF-585A-E882-E2BF9647AFAD}"/>
+              <a16:creationId xmlns:a16="http://schemas.microsoft.com/office/drawing/2014/main" xmlns="" id="{9E1C0F14-DBDF-585A-E882-E2BF9647AFAD}"/>
             </a:ext>
           </a:extLst>
         </p:cNvPr>
@@ -2736,7 +2736,7 @@
           <p:cNvPr id="171" name="Google Shape;171;p7:notes">
             <a:extLst>
               <a:ext uri="{FF2B5EF4-FFF2-40B4-BE49-F238E27FC236}">
-                <a16:creationId xmlns="" xmlns:a16="http://schemas.microsoft.com/office/drawing/2014/main" id="{7E6D42C4-06DC-AB21-7112-CEF37FBD57EA}"/>
+                <a16:creationId xmlns:a16="http://schemas.microsoft.com/office/drawing/2014/main" xmlns="" id="{7E6D42C4-06DC-AB21-7112-CEF37FBD57EA}"/>
               </a:ext>
             </a:extLst>
           </p:cNvPr>
@@ -2780,7 +2780,7 @@
           <p:cNvPr id="172" name="Google Shape;172;p7:notes">
             <a:extLst>
               <a:ext uri="{FF2B5EF4-FFF2-40B4-BE49-F238E27FC236}">
-                <a16:creationId xmlns="" xmlns:a16="http://schemas.microsoft.com/office/drawing/2014/main" id="{954B99EC-4B17-0504-2C36-7D6C91B3C0F3}"/>
+                <a16:creationId xmlns:a16="http://schemas.microsoft.com/office/drawing/2014/main" xmlns="" id="{954B99EC-4B17-0504-2C36-7D6C91B3C0F3}"/>
               </a:ext>
             </a:extLst>
           </p:cNvPr>
@@ -2843,7 +2843,7 @@
         <p:cNvPr id="1" name="Shape 170">
           <a:extLst>
             <a:ext uri="{FF2B5EF4-FFF2-40B4-BE49-F238E27FC236}">
-              <a16:creationId xmlns="" xmlns:a16="http://schemas.microsoft.com/office/drawing/2014/main" id="{27D158B3-CBD8-B5E4-6B76-365327AB8555}"/>
+              <a16:creationId xmlns:a16="http://schemas.microsoft.com/office/drawing/2014/main" xmlns="" id="{27D158B3-CBD8-B5E4-6B76-365327AB8555}"/>
             </a:ext>
           </a:extLst>
         </p:cNvPr>
@@ -2863,7 +2863,7 @@
           <p:cNvPr id="171" name="Google Shape;171;p7:notes">
             <a:extLst>
               <a:ext uri="{FF2B5EF4-FFF2-40B4-BE49-F238E27FC236}">
-                <a16:creationId xmlns="" xmlns:a16="http://schemas.microsoft.com/office/drawing/2014/main" id="{010A094C-68D7-7C06-1676-FE4856468B62}"/>
+                <a16:creationId xmlns:a16="http://schemas.microsoft.com/office/drawing/2014/main" xmlns="" id="{010A094C-68D7-7C06-1676-FE4856468B62}"/>
               </a:ext>
             </a:extLst>
           </p:cNvPr>
@@ -2907,7 +2907,7 @@
           <p:cNvPr id="172" name="Google Shape;172;p7:notes">
             <a:extLst>
               <a:ext uri="{FF2B5EF4-FFF2-40B4-BE49-F238E27FC236}">
-                <a16:creationId xmlns="" xmlns:a16="http://schemas.microsoft.com/office/drawing/2014/main" id="{9E3ED5FD-8C53-1F8E-D724-51F89F8FBB0E}"/>
+                <a16:creationId xmlns:a16="http://schemas.microsoft.com/office/drawing/2014/main" xmlns="" id="{9E3ED5FD-8C53-1F8E-D724-51F89F8FBB0E}"/>
               </a:ext>
             </a:extLst>
           </p:cNvPr>
@@ -2970,7 +2970,7 @@
         <p:cNvPr id="1" name="Shape 170">
           <a:extLst>
             <a:ext uri="{FF2B5EF4-FFF2-40B4-BE49-F238E27FC236}">
-              <a16:creationId xmlns="" xmlns:a16="http://schemas.microsoft.com/office/drawing/2014/main" id="{9508F664-A613-C49E-6808-FC67C002D8D2}"/>
+              <a16:creationId xmlns:a16="http://schemas.microsoft.com/office/drawing/2014/main" xmlns="" id="{9508F664-A613-C49E-6808-FC67C002D8D2}"/>
             </a:ext>
           </a:extLst>
         </p:cNvPr>
@@ -2990,7 +2990,7 @@
           <p:cNvPr id="171" name="Google Shape;171;p7:notes">
             <a:extLst>
               <a:ext uri="{FF2B5EF4-FFF2-40B4-BE49-F238E27FC236}">
-                <a16:creationId xmlns="" xmlns:a16="http://schemas.microsoft.com/office/drawing/2014/main" id="{C7AA89D1-36B1-C3BD-0BE6-28C6BBF7E41C}"/>
+                <a16:creationId xmlns:a16="http://schemas.microsoft.com/office/drawing/2014/main" xmlns="" id="{C7AA89D1-36B1-C3BD-0BE6-28C6BBF7E41C}"/>
               </a:ext>
             </a:extLst>
           </p:cNvPr>
@@ -3034,7 +3034,7 @@
           <p:cNvPr id="172" name="Google Shape;172;p7:notes">
             <a:extLst>
               <a:ext uri="{FF2B5EF4-FFF2-40B4-BE49-F238E27FC236}">
-                <a16:creationId xmlns="" xmlns:a16="http://schemas.microsoft.com/office/drawing/2014/main" id="{EC720C9B-1798-C39A-D4BB-62F3C60E8653}"/>
+                <a16:creationId xmlns:a16="http://schemas.microsoft.com/office/drawing/2014/main" xmlns="" id="{EC720C9B-1798-C39A-D4BB-62F3C60E8653}"/>
               </a:ext>
             </a:extLst>
           </p:cNvPr>
@@ -12607,7 +12607,7 @@
           <p:cNvPr id="2" name="Title 1">
             <a:extLst>
               <a:ext uri="{FF2B5EF4-FFF2-40B4-BE49-F238E27FC236}">
-                <a16:creationId xmlns:a16="http://schemas.microsoft.com/office/drawing/2014/main" xmlns="" id="{9AF97BF8-B3EC-77A2-9BFD-D66830272D56}"/>
+                <a16:creationId xmlns="" xmlns:a16="http://schemas.microsoft.com/office/drawing/2014/main" id="{9AF97BF8-B3EC-77A2-9BFD-D66830272D56}"/>
               </a:ext>
             </a:extLst>
           </p:cNvPr>
@@ -12676,7 +12676,7 @@
           <p:cNvPr id="3" name="Text Placeholder 2">
             <a:extLst>
               <a:ext uri="{FF2B5EF4-FFF2-40B4-BE49-F238E27FC236}">
-                <a16:creationId xmlns:a16="http://schemas.microsoft.com/office/drawing/2014/main" xmlns="" id="{FFAB85A1-2169-FF43-3E91-E2E8ADA742FF}"/>
+                <a16:creationId xmlns="" xmlns:a16="http://schemas.microsoft.com/office/drawing/2014/main" id="{FFAB85A1-2169-FF43-3E91-E2E8ADA742FF}"/>
               </a:ext>
             </a:extLst>
           </p:cNvPr>
@@ -12727,7 +12727,7 @@
         <p:cNvPr id="1" name="Shape 173">
           <a:extLst>
             <a:ext uri="{FF2B5EF4-FFF2-40B4-BE49-F238E27FC236}">
-              <a16:creationId xmlns="" xmlns:a16="http://schemas.microsoft.com/office/drawing/2014/main" id="{B39EB1CD-538A-7DBD-F4E9-052D9D7D4303}"/>
+              <a16:creationId xmlns:a16="http://schemas.microsoft.com/office/drawing/2014/main" xmlns="" id="{B39EB1CD-538A-7DBD-F4E9-052D9D7D4303}"/>
             </a:ext>
           </a:extLst>
         </p:cNvPr>
@@ -12747,7 +12747,7 @@
           <p:cNvPr id="2" name="Google Shape;135;p5">
             <a:extLst>
               <a:ext uri="{FF2B5EF4-FFF2-40B4-BE49-F238E27FC236}">
-                <a16:creationId xmlns="" xmlns:a16="http://schemas.microsoft.com/office/drawing/2014/main" id="{E349D72E-AB17-BA23-03A8-4F38FE7B6316}"/>
+                <a16:creationId xmlns:a16="http://schemas.microsoft.com/office/drawing/2014/main" xmlns="" id="{E349D72E-AB17-BA23-03A8-4F38FE7B6316}"/>
               </a:ext>
             </a:extLst>
           </p:cNvPr>
@@ -12865,7 +12865,7 @@
         <p:cNvPr id="1" name="Shape 173">
           <a:extLst>
             <a:ext uri="{FF2B5EF4-FFF2-40B4-BE49-F238E27FC236}">
-              <a16:creationId xmlns="" xmlns:a16="http://schemas.microsoft.com/office/drawing/2014/main" id="{43221D92-1044-08AB-7B31-E72C3F63DB10}"/>
+              <a16:creationId xmlns:a16="http://schemas.microsoft.com/office/drawing/2014/main" xmlns="" id="{43221D92-1044-08AB-7B31-E72C3F63DB10}"/>
             </a:ext>
           </a:extLst>
         </p:cNvPr>
@@ -12885,7 +12885,7 @@
           <p:cNvPr id="2" name="Google Shape;135;p5">
             <a:extLst>
               <a:ext uri="{FF2B5EF4-FFF2-40B4-BE49-F238E27FC236}">
-                <a16:creationId xmlns="" xmlns:a16="http://schemas.microsoft.com/office/drawing/2014/main" id="{28B03A33-D1CB-E189-2BFF-63C16430879F}"/>
+                <a16:creationId xmlns:a16="http://schemas.microsoft.com/office/drawing/2014/main" xmlns="" id="{28B03A33-D1CB-E189-2BFF-63C16430879F}"/>
               </a:ext>
             </a:extLst>
           </p:cNvPr>
@@ -13003,7 +13003,7 @@
         <p:cNvPr id="1" name="Shape 173">
           <a:extLst>
             <a:ext uri="{FF2B5EF4-FFF2-40B4-BE49-F238E27FC236}">
-              <a16:creationId xmlns="" xmlns:a16="http://schemas.microsoft.com/office/drawing/2014/main" id="{7F7BFD7F-A5BE-424E-04E4-955393FB45D6}"/>
+              <a16:creationId xmlns:a16="http://schemas.microsoft.com/office/drawing/2014/main" xmlns="" id="{7F7BFD7F-A5BE-424E-04E4-955393FB45D6}"/>
             </a:ext>
           </a:extLst>
         </p:cNvPr>
@@ -13023,7 +13023,7 @@
           <p:cNvPr id="2" name="Google Shape;135;p5">
             <a:extLst>
               <a:ext uri="{FF2B5EF4-FFF2-40B4-BE49-F238E27FC236}">
-                <a16:creationId xmlns="" xmlns:a16="http://schemas.microsoft.com/office/drawing/2014/main" id="{84A94F7B-91E0-E5F0-4040-54299340996D}"/>
+                <a16:creationId xmlns:a16="http://schemas.microsoft.com/office/drawing/2014/main" xmlns="" id="{84A94F7B-91E0-E5F0-4040-54299340996D}"/>
               </a:ext>
             </a:extLst>
           </p:cNvPr>
@@ -13182,7 +13182,7 @@
           <p:cNvPr id="2" name="TextBox 1">
             <a:extLst>
               <a:ext uri="{FF2B5EF4-FFF2-40B4-BE49-F238E27FC236}">
-                <a16:creationId xmlns="" xmlns:a16="http://schemas.microsoft.com/office/drawing/2014/main" id="{B84A7B44-8B20-5A39-ED43-DA98D0FC7976}"/>
+                <a16:creationId xmlns:a16="http://schemas.microsoft.com/office/drawing/2014/main" xmlns="" id="{B84A7B44-8B20-5A39-ED43-DA98D0FC7976}"/>
               </a:ext>
             </a:extLst>
           </p:cNvPr>
@@ -13232,7 +13232,7 @@
           <p:cNvPr id="3" name="TextBox 2">
             <a:extLst>
               <a:ext uri="{FF2B5EF4-FFF2-40B4-BE49-F238E27FC236}">
-                <a16:creationId xmlns="" xmlns:a16="http://schemas.microsoft.com/office/drawing/2014/main" id="{322462E8-EB3A-DA7D-44CB-4E757803A755}"/>
+                <a16:creationId xmlns:a16="http://schemas.microsoft.com/office/drawing/2014/main" xmlns="" id="{322462E8-EB3A-DA7D-44CB-4E757803A755}"/>
               </a:ext>
             </a:extLst>
           </p:cNvPr>
@@ -13315,7 +13315,7 @@
         <p:cNvPr id="1" name="Shape 274">
           <a:extLst>
             <a:ext uri="{FF2B5EF4-FFF2-40B4-BE49-F238E27FC236}">
-              <a16:creationId xmlns="" xmlns:a16="http://schemas.microsoft.com/office/drawing/2014/main" id="{1863F011-FD59-2782-3732-0E3263170F5E}"/>
+              <a16:creationId xmlns:a16="http://schemas.microsoft.com/office/drawing/2014/main" xmlns="" id="{1863F011-FD59-2782-3732-0E3263170F5E}"/>
             </a:ext>
           </a:extLst>
         </p:cNvPr>
@@ -13335,7 +13335,7 @@
           <p:cNvPr id="278" name="Google Shape;278;p18">
             <a:extLst>
               <a:ext uri="{FF2B5EF4-FFF2-40B4-BE49-F238E27FC236}">
-                <a16:creationId xmlns="" xmlns:a16="http://schemas.microsoft.com/office/drawing/2014/main" id="{78DA0257-5105-834D-150D-50732C7248D1}"/>
+                <a16:creationId xmlns:a16="http://schemas.microsoft.com/office/drawing/2014/main" xmlns="" id="{78DA0257-5105-834D-150D-50732C7248D1}"/>
               </a:ext>
             </a:extLst>
           </p:cNvPr>
@@ -13427,7 +13427,7 @@
         <p:cNvPr id="1" name="Shape 274">
           <a:extLst>
             <a:ext uri="{FF2B5EF4-FFF2-40B4-BE49-F238E27FC236}">
-              <a16:creationId xmlns="" xmlns:a16="http://schemas.microsoft.com/office/drawing/2014/main" id="{A1254DC3-8448-76A3-8631-9484D98C80EB}"/>
+              <a16:creationId xmlns:a16="http://schemas.microsoft.com/office/drawing/2014/main" xmlns="" id="{A1254DC3-8448-76A3-8631-9484D98C80EB}"/>
             </a:ext>
           </a:extLst>
         </p:cNvPr>
@@ -13447,7 +13447,7 @@
           <p:cNvPr id="278" name="Google Shape;278;p18">
             <a:extLst>
               <a:ext uri="{FF2B5EF4-FFF2-40B4-BE49-F238E27FC236}">
-                <a16:creationId xmlns="" xmlns:a16="http://schemas.microsoft.com/office/drawing/2014/main" id="{A5DD5E73-E4F8-AB1C-5A5A-D4EBAD6FD1B8}"/>
+                <a16:creationId xmlns:a16="http://schemas.microsoft.com/office/drawing/2014/main" xmlns="" id="{A5DD5E73-E4F8-AB1C-5A5A-D4EBAD6FD1B8}"/>
               </a:ext>
             </a:extLst>
           </p:cNvPr>
@@ -13539,7 +13539,7 @@
         <p:cNvPr id="1" name="Shape 274">
           <a:extLst>
             <a:ext uri="{FF2B5EF4-FFF2-40B4-BE49-F238E27FC236}">
-              <a16:creationId xmlns="" xmlns:a16="http://schemas.microsoft.com/office/drawing/2014/main" id="{E3C4AEBB-2963-4EEE-D8ED-E3B5ABCFF21F}"/>
+              <a16:creationId xmlns:a16="http://schemas.microsoft.com/office/drawing/2014/main" xmlns="" id="{E3C4AEBB-2963-4EEE-D8ED-E3B5ABCFF21F}"/>
             </a:ext>
           </a:extLst>
         </p:cNvPr>
@@ -13559,7 +13559,7 @@
           <p:cNvPr id="278" name="Google Shape;278;p18">
             <a:extLst>
               <a:ext uri="{FF2B5EF4-FFF2-40B4-BE49-F238E27FC236}">
-                <a16:creationId xmlns="" xmlns:a16="http://schemas.microsoft.com/office/drawing/2014/main" id="{67AD5A0A-54A3-BC96-26BB-9C49B61555EC}"/>
+                <a16:creationId xmlns:a16="http://schemas.microsoft.com/office/drawing/2014/main" xmlns="" id="{67AD5A0A-54A3-BC96-26BB-9C49B61555EC}"/>
               </a:ext>
             </a:extLst>
           </p:cNvPr>
@@ -13651,7 +13651,7 @@
         <p:cNvPr id="1" name="Shape 200">
           <a:extLst>
             <a:ext uri="{FF2B5EF4-FFF2-40B4-BE49-F238E27FC236}">
-              <a16:creationId xmlns="" xmlns:a16="http://schemas.microsoft.com/office/drawing/2014/main" id="{EEDEC80F-FA4E-F3FF-DE90-87B861D0BD13}"/>
+              <a16:creationId xmlns:a16="http://schemas.microsoft.com/office/drawing/2014/main" xmlns="" id="{EEDEC80F-FA4E-F3FF-DE90-87B861D0BD13}"/>
             </a:ext>
           </a:extLst>
         </p:cNvPr>
@@ -13671,7 +13671,7 @@
           <p:cNvPr id="2" name="TextBox 1">
             <a:extLst>
               <a:ext uri="{FF2B5EF4-FFF2-40B4-BE49-F238E27FC236}">
-                <a16:creationId xmlns="" xmlns:a16="http://schemas.microsoft.com/office/drawing/2014/main" id="{6FA184BA-BCF2-3D7B-30D0-0F3CF30C161B}"/>
+                <a16:creationId xmlns:a16="http://schemas.microsoft.com/office/drawing/2014/main" xmlns="" id="{6FA184BA-BCF2-3D7B-30D0-0F3CF30C161B}"/>
               </a:ext>
             </a:extLst>
           </p:cNvPr>
@@ -13707,7 +13707,7 @@
           <p:cNvPr id="3" name="TextBox 2">
             <a:extLst>
               <a:ext uri="{FF2B5EF4-FFF2-40B4-BE49-F238E27FC236}">
-                <a16:creationId xmlns="" xmlns:a16="http://schemas.microsoft.com/office/drawing/2014/main" id="{ED65F54F-855A-0DB6-09A6-3212C5F7405B}"/>
+                <a16:creationId xmlns:a16="http://schemas.microsoft.com/office/drawing/2014/main" xmlns="" id="{ED65F54F-855A-0DB6-09A6-3212C5F7405B}"/>
               </a:ext>
             </a:extLst>
           </p:cNvPr>
@@ -13935,7 +13935,7 @@
         <p:cNvPr id="1" name="Shape 274">
           <a:extLst>
             <a:ext uri="{FF2B5EF4-FFF2-40B4-BE49-F238E27FC236}">
-              <a16:creationId xmlns="" xmlns:a16="http://schemas.microsoft.com/office/drawing/2014/main" id="{4D64937E-C9AD-3FA1-53E2-2ECBF2E4909F}"/>
+              <a16:creationId xmlns:a16="http://schemas.microsoft.com/office/drawing/2014/main" xmlns="" id="{4D64937E-C9AD-3FA1-53E2-2ECBF2E4909F}"/>
             </a:ext>
           </a:extLst>
         </p:cNvPr>
@@ -13955,7 +13955,7 @@
           <p:cNvPr id="278" name="Google Shape;278;p18">
             <a:extLst>
               <a:ext uri="{FF2B5EF4-FFF2-40B4-BE49-F238E27FC236}">
-                <a16:creationId xmlns="" xmlns:a16="http://schemas.microsoft.com/office/drawing/2014/main" id="{F71D9F5B-66BF-4840-40E0-2713F56C5E64}"/>
+                <a16:creationId xmlns:a16="http://schemas.microsoft.com/office/drawing/2014/main" xmlns="" id="{F71D9F5B-66BF-4840-40E0-2713F56C5E64}"/>
               </a:ext>
             </a:extLst>
           </p:cNvPr>
@@ -14015,7 +14015,7 @@
           <p:cNvPr id="279" name="Google Shape;279;p18">
             <a:extLst>
               <a:ext uri="{FF2B5EF4-FFF2-40B4-BE49-F238E27FC236}">
-                <a16:creationId xmlns="" xmlns:a16="http://schemas.microsoft.com/office/drawing/2014/main" id="{1231BA06-8686-7E6D-BCEC-6F33D9928770}"/>
+                <a16:creationId xmlns:a16="http://schemas.microsoft.com/office/drawing/2014/main" xmlns="" id="{1231BA06-8686-7E6D-BCEC-6F33D9928770}"/>
               </a:ext>
             </a:extLst>
           </p:cNvPr>
@@ -14332,7 +14332,7 @@
         <p:cNvPr id="1" name="Shape 274">
           <a:extLst>
             <a:ext uri="{FF2B5EF4-FFF2-40B4-BE49-F238E27FC236}">
-              <a16:creationId xmlns="" xmlns:a16="http://schemas.microsoft.com/office/drawing/2014/main" id="{7BB3C0CA-2F24-30DF-1D65-4440B864F08E}"/>
+              <a16:creationId xmlns:a16="http://schemas.microsoft.com/office/drawing/2014/main" xmlns="" id="{7BB3C0CA-2F24-30DF-1D65-4440B864F08E}"/>
             </a:ext>
           </a:extLst>
         </p:cNvPr>
@@ -14352,7 +14352,7 @@
           <p:cNvPr id="278" name="Google Shape;278;p18">
             <a:extLst>
               <a:ext uri="{FF2B5EF4-FFF2-40B4-BE49-F238E27FC236}">
-                <a16:creationId xmlns="" xmlns:a16="http://schemas.microsoft.com/office/drawing/2014/main" id="{187EEB9C-2E84-113A-3CE6-1507BF5B039F}"/>
+                <a16:creationId xmlns:a16="http://schemas.microsoft.com/office/drawing/2014/main" xmlns="" id="{187EEB9C-2E84-113A-3CE6-1507BF5B039F}"/>
               </a:ext>
             </a:extLst>
           </p:cNvPr>
@@ -14396,12 +14396,18 @@
               <a:buNone/>
             </a:pPr>
             <a:r>
-              <a:rPr lang="en-US" sz="2400" b="1">
+              <a:rPr lang="en-US" sz="2800" b="1" dirty="0" err="1">
                 <a:sym typeface="Times New Roman"/>
               </a:rPr>
-              <a:t>Git Hub Link</a:t>
-            </a:r>
-            <a:endParaRPr sz="2400" b="1">
+              <a:t>Git</a:t>
+            </a:r>
+            <a:r>
+              <a:rPr lang="en-US" sz="2800" b="1" dirty="0">
+                <a:sym typeface="Times New Roman"/>
+              </a:rPr>
+              <a:t> Hub Link</a:t>
+            </a:r>
+            <a:endParaRPr sz="2800" b="1" dirty="0">
               <a:sym typeface="Times New Roman"/>
             </a:endParaRPr>
           </a:p>
@@ -14412,7 +14418,7 @@
           <p:cNvPr id="279" name="Google Shape;279;p18">
             <a:extLst>
               <a:ext uri="{FF2B5EF4-FFF2-40B4-BE49-F238E27FC236}">
-                <a16:creationId xmlns="" xmlns:a16="http://schemas.microsoft.com/office/drawing/2014/main" id="{3711AF54-94A6-B837-31EF-9A8C4ECB9AF6}"/>
+                <a16:creationId xmlns:a16="http://schemas.microsoft.com/office/drawing/2014/main" xmlns="" id="{3711AF54-94A6-B837-31EF-9A8C4ECB9AF6}"/>
               </a:ext>
             </a:extLst>
           </p:cNvPr>
@@ -14438,104 +14444,17 @@
           </a:bodyPr>
           <a:lstStyle/>
           <a:p>
-            <a:pPr marL="0" marR="0" lvl="0" indent="0" algn="l" rtl="0">
+            <a:pPr lvl="0">
               <a:lnSpc>
                 <a:spcPct val="162162"/>
               </a:lnSpc>
-              <a:spcBef>
-                <a:spcPts val="0"/>
-              </a:spcBef>
-              <a:spcAft>
-                <a:spcPts val="0"/>
-              </a:spcAft>
               <a:buClr>
                 <a:srgbClr val="2B3541"/>
               </a:buClr>
               <a:buSzPts val="1850"/>
-              <a:buFont typeface="Times New Roman"/>
-              <a:buNone/>
             </a:pPr>
             <a:r>
-              <a:rPr lang="en-US" sz="1850" b="0" i="0" u="none" strike="noStrike" cap="none" dirty="0" smtClean="0">
-                <a:solidFill>
-                  <a:srgbClr val="2B3541"/>
-                </a:solidFill>
-                <a:latin typeface="Times New Roman"/>
-                <a:ea typeface="Times New Roman"/>
-                <a:cs typeface="Times New Roman"/>
-                <a:sym typeface="Times New Roman"/>
-              </a:rPr>
-              <a:t>Please </a:t>
-            </a:r>
-            <a:r>
-              <a:rPr lang="en-US" sz="1850" b="0" i="0" u="none" strike="noStrike" cap="none" dirty="0">
-                <a:solidFill>
-                  <a:srgbClr val="2B3541"/>
-                </a:solidFill>
-                <a:latin typeface="Times New Roman"/>
-                <a:ea typeface="Times New Roman"/>
-                <a:cs typeface="Times New Roman"/>
-                <a:sym typeface="Times New Roman"/>
-              </a:rPr>
-              <a:t>create public </a:t>
-            </a:r>
-            <a:r>
-              <a:rPr lang="en-US" sz="1850" b="0" i="0" u="none" strike="noStrike" cap="none" dirty="0" err="1">
-                <a:solidFill>
-                  <a:srgbClr val="2B3541"/>
-                </a:solidFill>
-                <a:latin typeface="Times New Roman"/>
-                <a:ea typeface="Times New Roman"/>
-                <a:cs typeface="Times New Roman"/>
-                <a:sym typeface="Times New Roman"/>
-              </a:rPr>
-              <a:t>github</a:t>
-            </a:r>
-            <a:r>
-              <a:rPr lang="en-US" sz="1850" b="0" i="0" u="none" strike="noStrike" cap="none" dirty="0">
-                <a:solidFill>
-                  <a:srgbClr val="2B3541"/>
-                </a:solidFill>
-                <a:latin typeface="Times New Roman"/>
-                <a:ea typeface="Times New Roman"/>
-                <a:cs typeface="Times New Roman"/>
-                <a:sym typeface="Times New Roman"/>
-              </a:rPr>
-              <a:t> repository (Enable Add README  button while creating repository) with format – </a:t>
-            </a:r>
-          </a:p>
-          <a:p>
-            <a:pPr marL="0" marR="0" lvl="0" indent="0" algn="l" rtl="0">
-              <a:lnSpc>
-                <a:spcPct val="162162"/>
-              </a:lnSpc>
-              <a:spcBef>
-                <a:spcPts val="0"/>
-              </a:spcBef>
-              <a:spcAft>
-                <a:spcPts val="0"/>
-              </a:spcAft>
-              <a:buClr>
-                <a:srgbClr val="2B3541"/>
-              </a:buClr>
-              <a:buSzPts val="1850"/>
-              <a:buFont typeface="Times New Roman"/>
-              <a:buNone/>
-            </a:pPr>
-            <a:r>
-              <a:rPr lang="en-US" sz="1850" dirty="0">
-                <a:solidFill>
-                  <a:srgbClr val="2B3541"/>
-                </a:solidFill>
-                <a:latin typeface="Times New Roman"/>
-                <a:ea typeface="Times New Roman"/>
-                <a:cs typeface="Times New Roman"/>
-                <a:sym typeface="Times New Roman"/>
-              </a:rPr>
-              <a:t>Please test and Paste the working  </a:t>
-            </a:r>
-            <a:r>
-              <a:rPr lang="en-US" sz="1850" dirty="0" err="1">
+              <a:rPr lang="en-US" sz="2000" dirty="0" err="1" smtClean="0">
                 <a:solidFill>
                   <a:srgbClr val="2B3541"/>
                 </a:solidFill>
@@ -14547,7 +14466,7 @@
               <a:t>Github</a:t>
             </a:r>
             <a:r>
-              <a:rPr lang="en-US" sz="1850" dirty="0">
+              <a:rPr lang="en-US" sz="2000" dirty="0" smtClean="0">
                 <a:solidFill>
                   <a:srgbClr val="2B3541"/>
                 </a:solidFill>
@@ -14556,21 +14475,10 @@
                 <a:cs typeface="Times New Roman"/>
                 <a:sym typeface="Times New Roman"/>
               </a:rPr>
-              <a:t> URL –</a:t>
-            </a:r>
-          </a:p>
-          <a:p>
-            <a:pPr lvl="0">
-              <a:lnSpc>
-                <a:spcPct val="162162"/>
-              </a:lnSpc>
-              <a:buClr>
-                <a:srgbClr val="2B3541"/>
-              </a:buClr>
-              <a:buSzPts val="1850"/>
-            </a:pPr>
-            <a:r>
-              <a:rPr lang="en-US" sz="1850" b="1" dirty="0">
+              <a:t> URL - https</a:t>
+            </a:r>
+            <a:r>
+              <a:rPr lang="en-US" sz="2000" dirty="0">
                 <a:solidFill>
                   <a:srgbClr val="2B3541"/>
                 </a:solidFill>
@@ -14579,159 +14487,9 @@
                 <a:cs typeface="Times New Roman"/>
                 <a:sym typeface="Times New Roman"/>
               </a:rPr>
-              <a:t>Make sure you have Uploaded following three files into your </a:t>
-            </a:r>
-            <a:r>
-              <a:rPr lang="en-US" sz="1850" b="1" dirty="0" err="1">
-                <a:solidFill>
-                  <a:srgbClr val="2B3541"/>
-                </a:solidFill>
-                <a:latin typeface="Times New Roman"/>
-                <a:ea typeface="Times New Roman"/>
-                <a:cs typeface="Times New Roman"/>
-                <a:sym typeface="Times New Roman"/>
-              </a:rPr>
-              <a:t>github</a:t>
-            </a:r>
-            <a:r>
-              <a:rPr lang="en-US" sz="1850" b="1" dirty="0">
-                <a:solidFill>
-                  <a:srgbClr val="2B3541"/>
-                </a:solidFill>
-                <a:latin typeface="Times New Roman"/>
-                <a:ea typeface="Times New Roman"/>
-                <a:cs typeface="Times New Roman"/>
-                <a:sym typeface="Times New Roman"/>
-              </a:rPr>
-              <a:t> repository  </a:t>
-            </a:r>
-            <a:r>
-              <a:rPr lang="en-US" sz="1850" dirty="0">
-                <a:solidFill>
-                  <a:srgbClr val="2B3541"/>
-                </a:solidFill>
-                <a:latin typeface="Times New Roman"/>
-                <a:ea typeface="Times New Roman"/>
-                <a:cs typeface="Times New Roman"/>
-                <a:sym typeface="Times New Roman"/>
-              </a:rPr>
-              <a:t/>
-            </a:r>
-            <a:br>
-              <a:rPr lang="en-US" sz="1850" dirty="0">
-                <a:solidFill>
-                  <a:srgbClr val="2B3541"/>
-                </a:solidFill>
-                <a:latin typeface="Times New Roman"/>
-                <a:ea typeface="Times New Roman"/>
-                <a:cs typeface="Times New Roman"/>
-                <a:sym typeface="Times New Roman"/>
-              </a:rPr>
-            </a:br>
-            <a:r>
-              <a:rPr lang="en-US" sz="1850" dirty="0">
-                <a:solidFill>
-                  <a:srgbClr val="2B3541"/>
-                </a:solidFill>
-                <a:latin typeface="Times New Roman"/>
-                <a:ea typeface="Times New Roman"/>
-                <a:cs typeface="Times New Roman"/>
-                <a:sym typeface="Times New Roman"/>
-              </a:rPr>
-              <a:t>1) All Agent relevant files of IBM Cloud , 2) yourproblemstatement.pdf file  3) your projectpresntation.pptx file 4)any other files </a:t>
-            </a:r>
-          </a:p>
-          <a:p>
-            <a:pPr marL="0" marR="0" lvl="0" indent="0" algn="l" rtl="0">
-              <a:lnSpc>
-                <a:spcPct val="162162"/>
-              </a:lnSpc>
-              <a:spcBef>
-                <a:spcPts val="0"/>
-              </a:spcBef>
-              <a:spcAft>
-                <a:spcPts val="0"/>
-              </a:spcAft>
-              <a:buClr>
-                <a:srgbClr val="2B3541"/>
-              </a:buClr>
-              <a:buSzPts val="1850"/>
-              <a:buFont typeface="Times New Roman"/>
-              <a:buNone/>
-            </a:pPr>
-            <a:endParaRPr sz="1850" b="0" i="0" u="none" strike="noStrike" cap="none" dirty="0">
-              <a:solidFill>
-                <a:srgbClr val="000000"/>
-              </a:solidFill>
-              <a:latin typeface="Times New Roman"/>
-              <a:ea typeface="Times New Roman"/>
-              <a:cs typeface="Times New Roman"/>
-              <a:sym typeface="Times New Roman"/>
-            </a:endParaRPr>
-          </a:p>
-        </p:txBody>
-      </p:sp>
-      <p:sp>
-        <p:nvSpPr>
-          <p:cNvPr id="280" name="Google Shape;280;p18">
-            <a:extLst>
-              <a:ext uri="{FF2B5EF4-FFF2-40B4-BE49-F238E27FC236}">
-                <a16:creationId xmlns="" xmlns:a16="http://schemas.microsoft.com/office/drawing/2014/main" id="{E228982D-BF81-530A-CBA1-E897A3CA8EF7}"/>
-              </a:ext>
-            </a:extLst>
-          </p:cNvPr>
-          <p:cNvSpPr/>
-          <p:nvPr/>
-        </p:nvSpPr>
-        <p:spPr>
-          <a:xfrm>
-            <a:off x="1218724" y="3360216"/>
-            <a:ext cx="7468553" cy="766048"/>
-          </a:xfrm>
-          <a:prstGeom prst="rect">
-            <a:avLst/>
-          </a:prstGeom>
-          <a:noFill/>
-          <a:ln>
-            <a:noFill/>
-          </a:ln>
-        </p:spPr>
-        <p:txBody>
-          <a:bodyPr spcFirstLastPara="1" wrap="square" lIns="0" tIns="0" rIns="0" bIns="0" anchor="t" anchorCtr="0">
-            <a:noAutofit/>
-          </a:bodyPr>
-          <a:lstStyle/>
-          <a:p>
-            <a:pPr marL="0" marR="0" lvl="0" indent="0" algn="l" rtl="0">
-              <a:lnSpc>
-                <a:spcPct val="162162"/>
-              </a:lnSpc>
-              <a:spcBef>
-                <a:spcPts val="0"/>
-              </a:spcBef>
-              <a:spcAft>
-                <a:spcPts val="0"/>
-              </a:spcAft>
-              <a:buClr>
-                <a:srgbClr val="2B3541"/>
-              </a:buClr>
-              <a:buSzPts val="1850"/>
-              <a:buFont typeface="Times New Roman"/>
-              <a:buNone/>
-            </a:pPr>
-            <a:r>
-              <a:rPr lang="en-US" sz="1850" b="0" i="0" u="none" strike="noStrike" cap="none">
-                <a:solidFill>
-                  <a:srgbClr val="2B3541"/>
-                </a:solidFill>
-                <a:latin typeface="Times New Roman"/>
-                <a:ea typeface="Times New Roman"/>
-                <a:cs typeface="Times New Roman"/>
-                <a:sym typeface="Times New Roman"/>
-              </a:rPr>
-              <a:t>·</a:t>
-            </a:r>
-            <a:endParaRPr sz="1850" b="0" i="0" u="none" strike="noStrike" cap="none">
+              <a:t>://github.com/prvaishnav2006-hub/Smart-Urban-Flooding-Drainage-Management-System.git</a:t>
+            </a:r>
+            <a:endParaRPr sz="2000" b="0" i="0" u="none" strike="noStrike" cap="none" dirty="0">
               <a:solidFill>
                 <a:srgbClr val="000000"/>
               </a:solidFill>
@@ -14908,28 +14666,28 @@
                 <a:gridCol w="2064867">
                   <a:extLst>
                     <a:ext uri="{9D8B030D-6E8A-4147-A177-3AD203B41FA5}">
-                      <a16:colId xmlns="" xmlns:a16="http://schemas.microsoft.com/office/drawing/2014/main" val="20000"/>
+                      <a16:colId xmlns:a16="http://schemas.microsoft.com/office/drawing/2014/main" xmlns="" val="20000"/>
                     </a:ext>
                   </a:extLst>
                 </a:gridCol>
                 <a:gridCol w="2443374">
                   <a:extLst>
                     <a:ext uri="{9D8B030D-6E8A-4147-A177-3AD203B41FA5}">
-                      <a16:colId xmlns="" xmlns:a16="http://schemas.microsoft.com/office/drawing/2014/main" val="20002"/>
+                      <a16:colId xmlns:a16="http://schemas.microsoft.com/office/drawing/2014/main" xmlns="" val="20002"/>
                     </a:ext>
                   </a:extLst>
                 </a:gridCol>
                 <a:gridCol w="2443374">
                   <a:extLst>
                     <a:ext uri="{9D8B030D-6E8A-4147-A177-3AD203B41FA5}">
-                      <a16:colId xmlns="" xmlns:a16="http://schemas.microsoft.com/office/drawing/2014/main" val="20003"/>
+                      <a16:colId xmlns:a16="http://schemas.microsoft.com/office/drawing/2014/main" xmlns="" val="20003"/>
                     </a:ext>
                   </a:extLst>
                 </a:gridCol>
                 <a:gridCol w="2443374">
                   <a:extLst>
                     <a:ext uri="{9D8B030D-6E8A-4147-A177-3AD203B41FA5}">
-                      <a16:colId xmlns="" xmlns:a16="http://schemas.microsoft.com/office/drawing/2014/main" val="20004"/>
+                      <a16:colId xmlns:a16="http://schemas.microsoft.com/office/drawing/2014/main" xmlns="" val="20004"/>
                     </a:ext>
                   </a:extLst>
                 </a:gridCol>
@@ -15274,7 +15032,7 @@
                 </a:tc>
                 <a:extLst>
                   <a:ext uri="{0D108BD9-81ED-4DB2-BD59-A6C34878D82A}">
-                    <a16:rowId xmlns="" xmlns:a16="http://schemas.microsoft.com/office/drawing/2014/main" val="10000"/>
+                    <a16:rowId xmlns:a16="http://schemas.microsoft.com/office/drawing/2014/main" xmlns="" val="10000"/>
                   </a:ext>
                 </a:extLst>
               </a:tr>
@@ -15609,7 +15367,7 @@
                 </a:tc>
                 <a:extLst>
                   <a:ext uri="{0D108BD9-81ED-4DB2-BD59-A6C34878D82A}">
-                    <a16:rowId xmlns="" xmlns:a16="http://schemas.microsoft.com/office/drawing/2014/main" val="10001"/>
+                    <a16:rowId xmlns:a16="http://schemas.microsoft.com/office/drawing/2014/main" xmlns="" val="10001"/>
                   </a:ext>
                 </a:extLst>
               </a:tr>
@@ -15622,7 +15380,7 @@
           <p:cNvPr id="4" name="TextBox 3">
             <a:extLst>
               <a:ext uri="{FF2B5EF4-FFF2-40B4-BE49-F238E27FC236}">
-                <a16:creationId xmlns="" xmlns:a16="http://schemas.microsoft.com/office/drawing/2014/main" id="{A828B9EF-C084-F5D4-CA27-75AF7D995640}"/>
+                <a16:creationId xmlns:a16="http://schemas.microsoft.com/office/drawing/2014/main" xmlns="" id="{A828B9EF-C084-F5D4-CA27-75AF7D995640}"/>
               </a:ext>
             </a:extLst>
           </p:cNvPr>
@@ -15666,7 +15424,7 @@
           <p:cNvPr id="7" name="TextBox 6">
             <a:extLst>
               <a:ext uri="{FF2B5EF4-FFF2-40B4-BE49-F238E27FC236}">
-                <a16:creationId xmlns="" xmlns:a16="http://schemas.microsoft.com/office/drawing/2014/main" id="{3D723CA3-EC2D-165A-F109-3759C4E9C8A4}"/>
+                <a16:creationId xmlns:a16="http://schemas.microsoft.com/office/drawing/2014/main" xmlns="" id="{3D723CA3-EC2D-165A-F109-3759C4E9C8A4}"/>
               </a:ext>
             </a:extLst>
           </p:cNvPr>
@@ -15767,28 +15525,28 @@
                 <a:gridCol w="2064867">
                   <a:extLst>
                     <a:ext uri="{9D8B030D-6E8A-4147-A177-3AD203B41FA5}">
-                      <a16:colId xmlns="" xmlns:a16="http://schemas.microsoft.com/office/drawing/2014/main" val="20000"/>
+                      <a16:colId xmlns:a16="http://schemas.microsoft.com/office/drawing/2014/main" xmlns="" val="20000"/>
                     </a:ext>
                   </a:extLst>
                 </a:gridCol>
                 <a:gridCol w="2443374">
                   <a:extLst>
                     <a:ext uri="{9D8B030D-6E8A-4147-A177-3AD203B41FA5}">
-                      <a16:colId xmlns="" xmlns:a16="http://schemas.microsoft.com/office/drawing/2014/main" val="20002"/>
+                      <a16:colId xmlns:a16="http://schemas.microsoft.com/office/drawing/2014/main" xmlns="" val="20002"/>
                     </a:ext>
                   </a:extLst>
                 </a:gridCol>
                 <a:gridCol w="2443374">
                   <a:extLst>
                     <a:ext uri="{9D8B030D-6E8A-4147-A177-3AD203B41FA5}">
-                      <a16:colId xmlns="" xmlns:a16="http://schemas.microsoft.com/office/drawing/2014/main" val="20003"/>
+                      <a16:colId xmlns:a16="http://schemas.microsoft.com/office/drawing/2014/main" xmlns="" val="20003"/>
                     </a:ext>
                   </a:extLst>
                 </a:gridCol>
                 <a:gridCol w="2443374">
                   <a:extLst>
                     <a:ext uri="{9D8B030D-6E8A-4147-A177-3AD203B41FA5}">
-                      <a16:colId xmlns="" xmlns:a16="http://schemas.microsoft.com/office/drawing/2014/main" val="20004"/>
+                      <a16:colId xmlns:a16="http://schemas.microsoft.com/office/drawing/2014/main" xmlns="" val="20004"/>
                     </a:ext>
                   </a:extLst>
                 </a:gridCol>
@@ -16133,7 +15891,7 @@
                 </a:tc>
                 <a:extLst>
                   <a:ext uri="{0D108BD9-81ED-4DB2-BD59-A6C34878D82A}">
-                    <a16:rowId xmlns="" xmlns:a16="http://schemas.microsoft.com/office/drawing/2014/main" val="10000"/>
+                    <a16:rowId xmlns:a16="http://schemas.microsoft.com/office/drawing/2014/main" xmlns="" val="10000"/>
                   </a:ext>
                 </a:extLst>
               </a:tr>
@@ -16425,7 +16183,7 @@
                 </a:tc>
                 <a:extLst>
                   <a:ext uri="{0D108BD9-81ED-4DB2-BD59-A6C34878D82A}">
-                    <a16:rowId xmlns="" xmlns:a16="http://schemas.microsoft.com/office/drawing/2014/main" val="10001"/>
+                    <a16:rowId xmlns:a16="http://schemas.microsoft.com/office/drawing/2014/main" xmlns="" val="10001"/>
                   </a:ext>
                 </a:extLst>
               </a:tr>
@@ -16489,7 +16247,7 @@
         <p:cNvPr id="1" name="">
           <a:extLst>
             <a:ext uri="{FF2B5EF4-FFF2-40B4-BE49-F238E27FC236}">
-              <a16:creationId xmlns="" xmlns:a16="http://schemas.microsoft.com/office/drawing/2014/main" id="{0E4AB062-BFE8-81E7-7937-7FF058CAE379}"/>
+              <a16:creationId xmlns:a16="http://schemas.microsoft.com/office/drawing/2014/main" xmlns="" id="{0E4AB062-BFE8-81E7-7937-7FF058CAE379}"/>
             </a:ext>
           </a:extLst>
         </p:cNvPr>
@@ -16509,7 +16267,7 @@
           <p:cNvPr id="6" name="TextBox 5">
             <a:extLst>
               <a:ext uri="{FF2B5EF4-FFF2-40B4-BE49-F238E27FC236}">
-                <a16:creationId xmlns="" xmlns:a16="http://schemas.microsoft.com/office/drawing/2014/main" id="{36244D29-5E1E-8A40-F4D0-25314C4B7361}"/>
+                <a16:creationId xmlns:a16="http://schemas.microsoft.com/office/drawing/2014/main" xmlns="" id="{36244D29-5E1E-8A40-F4D0-25314C4B7361}"/>
               </a:ext>
             </a:extLst>
           </p:cNvPr>
@@ -16635,7 +16393,7 @@
           <p:cNvPr id="5" name="TextBox 4">
             <a:extLst>
               <a:ext uri="{FF2B5EF4-FFF2-40B4-BE49-F238E27FC236}">
-                <a16:creationId xmlns="" xmlns:a16="http://schemas.microsoft.com/office/drawing/2014/main" id="{CA8544A9-CF92-3FAF-D3EE-31DF90F7A64D}"/>
+                <a16:creationId xmlns:a16="http://schemas.microsoft.com/office/drawing/2014/main" xmlns="" id="{CA8544A9-CF92-3FAF-D3EE-31DF90F7A64D}"/>
               </a:ext>
             </a:extLst>
           </p:cNvPr>
@@ -16821,7 +16579,7 @@
         <p:cNvPr id="1" name="Shape 103">
           <a:extLst>
             <a:ext uri="{FF2B5EF4-FFF2-40B4-BE49-F238E27FC236}">
-              <a16:creationId xmlns="" xmlns:a16="http://schemas.microsoft.com/office/drawing/2014/main" id="{F4C0A7C6-2888-EA53-35AB-4072E6B1FDAC}"/>
+              <a16:creationId xmlns:a16="http://schemas.microsoft.com/office/drawing/2014/main" xmlns="" id="{F4C0A7C6-2888-EA53-35AB-4072E6B1FDAC}"/>
             </a:ext>
           </a:extLst>
         </p:cNvPr>
@@ -16841,7 +16599,7 @@
           <p:cNvPr id="2" name="TextBox 1">
             <a:extLst>
               <a:ext uri="{FF2B5EF4-FFF2-40B4-BE49-F238E27FC236}">
-                <a16:creationId xmlns="" xmlns:a16="http://schemas.microsoft.com/office/drawing/2014/main" id="{C6F6745E-14BA-0766-CE1E-32E29663832D}"/>
+                <a16:creationId xmlns:a16="http://schemas.microsoft.com/office/drawing/2014/main" xmlns="" id="{C6F6745E-14BA-0766-CE1E-32E29663832D}"/>
               </a:ext>
             </a:extLst>
           </p:cNvPr>
@@ -17115,7 +16873,7 @@
           <p:cNvPr id="3" name="TextBox 2">
             <a:extLst>
               <a:ext uri="{FF2B5EF4-FFF2-40B4-BE49-F238E27FC236}">
-                <a16:creationId xmlns="" xmlns:a16="http://schemas.microsoft.com/office/drawing/2014/main" id="{3847FA31-EA47-D27A-9D69-AF50A3080AEC}"/>
+                <a16:creationId xmlns:a16="http://schemas.microsoft.com/office/drawing/2014/main" xmlns="" id="{3847FA31-EA47-D27A-9D69-AF50A3080AEC}"/>
               </a:ext>
             </a:extLst>
           </p:cNvPr>
@@ -17182,7 +16940,7 @@
         <p:cNvPr id="1" name="Shape 103">
           <a:extLst>
             <a:ext uri="{FF2B5EF4-FFF2-40B4-BE49-F238E27FC236}">
-              <a16:creationId xmlns="" xmlns:a16="http://schemas.microsoft.com/office/drawing/2014/main" id="{0471B467-61AA-7BCA-460D-43041E805F9C}"/>
+              <a16:creationId xmlns:a16="http://schemas.microsoft.com/office/drawing/2014/main" xmlns="" id="{0471B467-61AA-7BCA-460D-43041E805F9C}"/>
             </a:ext>
           </a:extLst>
         </p:cNvPr>
@@ -17202,7 +16960,7 @@
           <p:cNvPr id="2" name="TextBox 1">
             <a:extLst>
               <a:ext uri="{FF2B5EF4-FFF2-40B4-BE49-F238E27FC236}">
-                <a16:creationId xmlns="" xmlns:a16="http://schemas.microsoft.com/office/drawing/2014/main" id="{4A1BF701-ABCA-4DF0-8330-B6AF71EF8E39}"/>
+                <a16:creationId xmlns:a16="http://schemas.microsoft.com/office/drawing/2014/main" xmlns="" id="{4A1BF701-ABCA-4DF0-8330-B6AF71EF8E39}"/>
               </a:ext>
             </a:extLst>
           </p:cNvPr>
@@ -17470,7 +17228,7 @@
           <p:cNvPr id="3" name="TextBox 2">
             <a:extLst>
               <a:ext uri="{FF2B5EF4-FFF2-40B4-BE49-F238E27FC236}">
-                <a16:creationId xmlns="" xmlns:a16="http://schemas.microsoft.com/office/drawing/2014/main" id="{527F30CC-07EF-8FCC-DA00-C9212F5DAECE}"/>
+                <a16:creationId xmlns:a16="http://schemas.microsoft.com/office/drawing/2014/main" xmlns="" id="{527F30CC-07EF-8FCC-DA00-C9212F5DAECE}"/>
               </a:ext>
             </a:extLst>
           </p:cNvPr>
@@ -17522,7 +17280,7 @@
         <p:cNvPr id="1" name="Shape 200">
           <a:extLst>
             <a:ext uri="{FF2B5EF4-FFF2-40B4-BE49-F238E27FC236}">
-              <a16:creationId xmlns="" xmlns:a16="http://schemas.microsoft.com/office/drawing/2014/main" id="{7C2A09DE-0AE2-AA94-B2C1-84FDBDB9DC64}"/>
+              <a16:creationId xmlns:a16="http://schemas.microsoft.com/office/drawing/2014/main" xmlns="" id="{7C2A09DE-0AE2-AA94-B2C1-84FDBDB9DC64}"/>
             </a:ext>
           </a:extLst>
         </p:cNvPr>
@@ -17542,7 +17300,7 @@
           <p:cNvPr id="2" name="TextBox 1">
             <a:extLst>
               <a:ext uri="{FF2B5EF4-FFF2-40B4-BE49-F238E27FC236}">
-                <a16:creationId xmlns="" xmlns:a16="http://schemas.microsoft.com/office/drawing/2014/main" id="{151FBD4A-3273-E454-091D-D5B0678FC299}"/>
+                <a16:creationId xmlns:a16="http://schemas.microsoft.com/office/drawing/2014/main" xmlns="" id="{151FBD4A-3273-E454-091D-D5B0678FC299}"/>
               </a:ext>
             </a:extLst>
           </p:cNvPr>
@@ -17578,7 +17336,7 @@
           <p:cNvPr id="3" name="TextBox 2">
             <a:extLst>
               <a:ext uri="{FF2B5EF4-FFF2-40B4-BE49-F238E27FC236}">
-                <a16:creationId xmlns="" xmlns:a16="http://schemas.microsoft.com/office/drawing/2014/main" id="{4A7608B5-9906-EFCF-959A-E89FC2E3EE19}"/>
+                <a16:creationId xmlns:a16="http://schemas.microsoft.com/office/drawing/2014/main" xmlns="" id="{4A7608B5-9906-EFCF-959A-E89FC2E3EE19}"/>
               </a:ext>
             </a:extLst>
           </p:cNvPr>
@@ -18095,7 +17853,7 @@
         <p:cNvPr id="1" name="Shape 131">
           <a:extLst>
             <a:ext uri="{FF2B5EF4-FFF2-40B4-BE49-F238E27FC236}">
-              <a16:creationId xmlns="" xmlns:a16="http://schemas.microsoft.com/office/drawing/2014/main" id="{CDF2A78E-5A0E-6814-8AF4-0AE54B0366E1}"/>
+              <a16:creationId xmlns:a16="http://schemas.microsoft.com/office/drawing/2014/main" xmlns="" id="{CDF2A78E-5A0E-6814-8AF4-0AE54B0366E1}"/>
             </a:ext>
           </a:extLst>
         </p:cNvPr>
@@ -18115,7 +17873,7 @@
           <p:cNvPr id="135" name="Google Shape;135;p5">
             <a:extLst>
               <a:ext uri="{FF2B5EF4-FFF2-40B4-BE49-F238E27FC236}">
-                <a16:creationId xmlns="" xmlns:a16="http://schemas.microsoft.com/office/drawing/2014/main" id="{2A145802-2DD3-EEBA-7D44-210C05B98C91}"/>
+                <a16:creationId xmlns:a16="http://schemas.microsoft.com/office/drawing/2014/main" xmlns="" id="{2A145802-2DD3-EEBA-7D44-210C05B98C91}"/>
               </a:ext>
             </a:extLst>
           </p:cNvPr>
@@ -18175,7 +17933,7 @@
           <p:cNvPr id="148" name="Google Shape;148;p5">
             <a:extLst>
               <a:ext uri="{FF2B5EF4-FFF2-40B4-BE49-F238E27FC236}">
-                <a16:creationId xmlns="" xmlns:a16="http://schemas.microsoft.com/office/drawing/2014/main" id="{69E3EADC-1EAD-7419-145C-20998925206E}"/>
+                <a16:creationId xmlns:a16="http://schemas.microsoft.com/office/drawing/2014/main" xmlns="" id="{69E3EADC-1EAD-7419-145C-20998925206E}"/>
               </a:ext>
             </a:extLst>
           </p:cNvPr>
@@ -18235,7 +17993,7 @@
           <p:cNvPr id="149" name="Google Shape;149;p5">
             <a:extLst>
               <a:ext uri="{FF2B5EF4-FFF2-40B4-BE49-F238E27FC236}">
-                <a16:creationId xmlns="" xmlns:a16="http://schemas.microsoft.com/office/drawing/2014/main" id="{04E5872A-C331-C8F3-5D71-8E953BAAFE03}"/>
+                <a16:creationId xmlns:a16="http://schemas.microsoft.com/office/drawing/2014/main" xmlns="" id="{04E5872A-C331-C8F3-5D71-8E953BAAFE03}"/>
               </a:ext>
             </a:extLst>
           </p:cNvPr>
@@ -18295,7 +18053,7 @@
           <p:cNvPr id="150" name="Google Shape;150;p5">
             <a:extLst>
               <a:ext uri="{FF2B5EF4-FFF2-40B4-BE49-F238E27FC236}">
-                <a16:creationId xmlns="" xmlns:a16="http://schemas.microsoft.com/office/drawing/2014/main" id="{76EF3801-5D99-5EFA-9AA2-AD265775E354}"/>
+                <a16:creationId xmlns:a16="http://schemas.microsoft.com/office/drawing/2014/main" xmlns="" id="{76EF3801-5D99-5EFA-9AA2-AD265775E354}"/>
               </a:ext>
             </a:extLst>
           </p:cNvPr>
@@ -18355,7 +18113,7 @@
           <p:cNvPr id="151" name="Google Shape;151;p5">
             <a:extLst>
               <a:ext uri="{FF2B5EF4-FFF2-40B4-BE49-F238E27FC236}">
-                <a16:creationId xmlns="" xmlns:a16="http://schemas.microsoft.com/office/drawing/2014/main" id="{DAD76A8A-9F2C-9EA9-25E9-40CD0FFAA869}"/>
+                <a16:creationId xmlns:a16="http://schemas.microsoft.com/office/drawing/2014/main" xmlns="" id="{DAD76A8A-9F2C-9EA9-25E9-40CD0FFAA869}"/>
               </a:ext>
             </a:extLst>
           </p:cNvPr>
@@ -18415,7 +18173,7 @@
           <p:cNvPr id="152" name="Google Shape;152;p5">
             <a:extLst>
               <a:ext uri="{FF2B5EF4-FFF2-40B4-BE49-F238E27FC236}">
-                <a16:creationId xmlns="" xmlns:a16="http://schemas.microsoft.com/office/drawing/2014/main" id="{8D9C4260-2673-337C-C898-4C22E0F8FD65}"/>
+                <a16:creationId xmlns:a16="http://schemas.microsoft.com/office/drawing/2014/main" xmlns="" id="{8D9C4260-2673-337C-C898-4C22E0F8FD65}"/>
               </a:ext>
             </a:extLst>
           </p:cNvPr>
@@ -18475,7 +18233,7 @@
           <p:cNvPr id="153" name="Google Shape;153;p5">
             <a:extLst>
               <a:ext uri="{FF2B5EF4-FFF2-40B4-BE49-F238E27FC236}">
-                <a16:creationId xmlns="" xmlns:a16="http://schemas.microsoft.com/office/drawing/2014/main" id="{6167C3C6-3747-E373-84C3-3927C443B067}"/>
+                <a16:creationId xmlns:a16="http://schemas.microsoft.com/office/drawing/2014/main" xmlns="" id="{6167C3C6-3747-E373-84C3-3927C443B067}"/>
               </a:ext>
             </a:extLst>
           </p:cNvPr>
@@ -18575,7 +18333,7 @@
         <p:cNvPr id="1" name="Shape 173">
           <a:extLst>
             <a:ext uri="{FF2B5EF4-FFF2-40B4-BE49-F238E27FC236}">
-              <a16:creationId xmlns="" xmlns:a16="http://schemas.microsoft.com/office/drawing/2014/main" id="{CA6090C0-0478-84F9-6D20-717B6FEB7326}"/>
+              <a16:creationId xmlns:a16="http://schemas.microsoft.com/office/drawing/2014/main" xmlns="" id="{CA6090C0-0478-84F9-6D20-717B6FEB7326}"/>
             </a:ext>
           </a:extLst>
         </p:cNvPr>
@@ -18595,7 +18353,7 @@
           <p:cNvPr id="2" name="Google Shape;135;p5">
             <a:extLst>
               <a:ext uri="{FF2B5EF4-FFF2-40B4-BE49-F238E27FC236}">
-                <a16:creationId xmlns="" xmlns:a16="http://schemas.microsoft.com/office/drawing/2014/main" id="{B64CF172-D2AF-03D8-F919-AA7827A0D969}"/>
+                <a16:creationId xmlns:a16="http://schemas.microsoft.com/office/drawing/2014/main" xmlns="" id="{B64CF172-D2AF-03D8-F919-AA7827A0D969}"/>
               </a:ext>
             </a:extLst>
           </p:cNvPr>
@@ -18713,7 +18471,7 @@
         <p:cNvPr id="1" name="Shape 173">
           <a:extLst>
             <a:ext uri="{FF2B5EF4-FFF2-40B4-BE49-F238E27FC236}">
-              <a16:creationId xmlns="" xmlns:a16="http://schemas.microsoft.com/office/drawing/2014/main" id="{AF7A05F8-6C8B-A51B-B050-0E9212E8B1F3}"/>
+              <a16:creationId xmlns:a16="http://schemas.microsoft.com/office/drawing/2014/main" xmlns="" id="{AF7A05F8-6C8B-A51B-B050-0E9212E8B1F3}"/>
             </a:ext>
           </a:extLst>
         </p:cNvPr>
@@ -18733,7 +18491,7 @@
           <p:cNvPr id="2" name="Google Shape;135;p5">
             <a:extLst>
               <a:ext uri="{FF2B5EF4-FFF2-40B4-BE49-F238E27FC236}">
-                <a16:creationId xmlns="" xmlns:a16="http://schemas.microsoft.com/office/drawing/2014/main" id="{AAB01743-CD2D-F92D-BF92-DF9E50E45548}"/>
+                <a16:creationId xmlns:a16="http://schemas.microsoft.com/office/drawing/2014/main" xmlns="" id="{AAB01743-CD2D-F92D-BF92-DF9E50E45548}"/>
               </a:ext>
             </a:extLst>
           </p:cNvPr>
@@ -18851,7 +18609,7 @@
         <p:cNvPr id="1" name="Shape 173">
           <a:extLst>
             <a:ext uri="{FF2B5EF4-FFF2-40B4-BE49-F238E27FC236}">
-              <a16:creationId xmlns="" xmlns:a16="http://schemas.microsoft.com/office/drawing/2014/main" id="{EC248B62-90B0-31EF-B033-CE55CB376930}"/>
+              <a16:creationId xmlns:a16="http://schemas.microsoft.com/office/drawing/2014/main" xmlns="" id="{EC248B62-90B0-31EF-B033-CE55CB376930}"/>
             </a:ext>
           </a:extLst>
         </p:cNvPr>
@@ -18871,7 +18629,7 @@
           <p:cNvPr id="2" name="Google Shape;135;p5">
             <a:extLst>
               <a:ext uri="{FF2B5EF4-FFF2-40B4-BE49-F238E27FC236}">
-                <a16:creationId xmlns="" xmlns:a16="http://schemas.microsoft.com/office/drawing/2014/main" id="{99445627-361C-FF92-A0E9-D6EFBDBAF34E}"/>
+                <a16:creationId xmlns:a16="http://schemas.microsoft.com/office/drawing/2014/main" xmlns="" id="{99445627-361C-FF92-A0E9-D6EFBDBAF34E}"/>
               </a:ext>
             </a:extLst>
           </p:cNvPr>
